--- a/literature-agent-demo/文献阅读整理Agent-功能演示说明.pptx
+++ b/literature-agent-demo/文献阅读整理Agent-功能演示说明.pptx
@@ -15024,7 +15024,7 @@
               <a:defRPr/>
             </a:pPr>
             <a:r>
-              <a:rPr lang="en-US" sz="1500" b="0" i="0" u="none" strike="noStrike">
+              <a:rPr lang="zh-CN" altLang="en-US" sz="1500" b="0" i="0" u="none" strike="noStrike">
                 <a:solidFill>
                   <a:srgbClr val="C6D4E8"/>
                 </a:solidFill>
@@ -15033,9 +15033,29 @@
                 <a:cs typeface="Noto Sans SC" panose="020B0200000000000000" charset="-122"/>
                 <a:sym typeface="Noto Sans SC" panose="020B0200000000000000" charset="-122"/>
               </a:rPr>
-              <a:t>本地 Agent 编排 AI + 本地中间件 + 三重反幻觉校验：把"上传即返回"的黑盒，升级为可解释、可校验、可降级的桌面端智能体。</a:t>
-            </a:r>
-            <a:endParaRPr lang="en-US" sz="1100"/>
+              <a:t>刘浚哲（后端）、刘俊源（前端）、朱展裕（测试）、郭城（</a:t>
+            </a:r>
+            <a:r>
+              <a:rPr lang="zh-CN" altLang="en-US" sz="1500" b="0" i="0" u="none" strike="noStrike">
+                <a:solidFill>
+                  <a:srgbClr val="C6D4E8"/>
+                </a:solidFill>
+                <a:latin typeface="Noto Sans SC" panose="020B0200000000000000" charset="-122"/>
+                <a:ea typeface="Noto Sans SC" panose="020B0200000000000000" charset="-122"/>
+                <a:cs typeface="Noto Sans SC" panose="020B0200000000000000" charset="-122"/>
+                <a:sym typeface="Noto Sans SC" panose="020B0200000000000000" charset="-122"/>
+              </a:rPr>
+              <a:t>项目经理）</a:t>
+            </a:r>
+            <a:endParaRPr lang="zh-CN" altLang="en-US" sz="1500" b="0" i="0" u="none" strike="noStrike">
+              <a:solidFill>
+                <a:srgbClr val="C6D4E8"/>
+              </a:solidFill>
+              <a:latin typeface="Noto Sans SC" panose="020B0200000000000000" charset="-122"/>
+              <a:ea typeface="Noto Sans SC" panose="020B0200000000000000" charset="-122"/>
+              <a:cs typeface="Noto Sans SC" panose="020B0200000000000000" charset="-122"/>
+              <a:sym typeface="Noto Sans SC" panose="020B0200000000000000" charset="-122"/>
+            </a:endParaRPr>
           </a:p>
         </p:txBody>
       </p:sp>
